--- a/3_CGE/Game_theory_2024/5_Visualisation/Figure_3.pptx
+++ b/3_CGE/Game_theory_2024/5_Visualisation/Figure_3.pptx
@@ -243,7 +243,7 @@
           <a:p>
             <a:fld id="{EED1C14C-A143-42F5-B247-D0E800131009}" type="datetimeFigureOut">
               <a:rPr lang="en-US" smtClean="0"/>
-              <a:t>2/6/2025</a:t>
+              <a:t>12/17/2025</a:t>
             </a:fld>
             <a:endParaRPr lang="en-US"/>
           </a:p>
@@ -413,7 +413,7 @@
           <a:p>
             <a:fld id="{EED1C14C-A143-42F5-B247-D0E800131009}" type="datetimeFigureOut">
               <a:rPr lang="en-US" smtClean="0"/>
-              <a:t>2/6/2025</a:t>
+              <a:t>12/17/2025</a:t>
             </a:fld>
             <a:endParaRPr lang="en-US"/>
           </a:p>
@@ -593,7 +593,7 @@
           <a:p>
             <a:fld id="{EED1C14C-A143-42F5-B247-D0E800131009}" type="datetimeFigureOut">
               <a:rPr lang="en-US" smtClean="0"/>
-              <a:t>2/6/2025</a:t>
+              <a:t>12/17/2025</a:t>
             </a:fld>
             <a:endParaRPr lang="en-US"/>
           </a:p>
@@ -763,7 +763,7 @@
           <a:p>
             <a:fld id="{EED1C14C-A143-42F5-B247-D0E800131009}" type="datetimeFigureOut">
               <a:rPr lang="en-US" smtClean="0"/>
-              <a:t>2/6/2025</a:t>
+              <a:t>12/17/2025</a:t>
             </a:fld>
             <a:endParaRPr lang="en-US"/>
           </a:p>
@@ -1007,7 +1007,7 @@
           <a:p>
             <a:fld id="{EED1C14C-A143-42F5-B247-D0E800131009}" type="datetimeFigureOut">
               <a:rPr lang="en-US" smtClean="0"/>
-              <a:t>2/6/2025</a:t>
+              <a:t>12/17/2025</a:t>
             </a:fld>
             <a:endParaRPr lang="en-US"/>
           </a:p>
@@ -1239,7 +1239,7 @@
           <a:p>
             <a:fld id="{EED1C14C-A143-42F5-B247-D0E800131009}" type="datetimeFigureOut">
               <a:rPr lang="en-US" smtClean="0"/>
-              <a:t>2/6/2025</a:t>
+              <a:t>12/17/2025</a:t>
             </a:fld>
             <a:endParaRPr lang="en-US"/>
           </a:p>
@@ -1606,7 +1606,7 @@
           <a:p>
             <a:fld id="{EED1C14C-A143-42F5-B247-D0E800131009}" type="datetimeFigureOut">
               <a:rPr lang="en-US" smtClean="0"/>
-              <a:t>2/6/2025</a:t>
+              <a:t>12/17/2025</a:t>
             </a:fld>
             <a:endParaRPr lang="en-US"/>
           </a:p>
@@ -1724,7 +1724,7 @@
           <a:p>
             <a:fld id="{EED1C14C-A143-42F5-B247-D0E800131009}" type="datetimeFigureOut">
               <a:rPr lang="en-US" smtClean="0"/>
-              <a:t>2/6/2025</a:t>
+              <a:t>12/17/2025</a:t>
             </a:fld>
             <a:endParaRPr lang="en-US"/>
           </a:p>
@@ -1819,7 +1819,7 @@
           <a:p>
             <a:fld id="{EED1C14C-A143-42F5-B247-D0E800131009}" type="datetimeFigureOut">
               <a:rPr lang="en-US" smtClean="0"/>
-              <a:t>2/6/2025</a:t>
+              <a:t>12/17/2025</a:t>
             </a:fld>
             <a:endParaRPr lang="en-US"/>
           </a:p>
@@ -2096,7 +2096,7 @@
           <a:p>
             <a:fld id="{EED1C14C-A143-42F5-B247-D0E800131009}" type="datetimeFigureOut">
               <a:rPr lang="en-US" smtClean="0"/>
-              <a:t>2/6/2025</a:t>
+              <a:t>12/17/2025</a:t>
             </a:fld>
             <a:endParaRPr lang="en-US"/>
           </a:p>
@@ -2353,7 +2353,7 @@
           <a:p>
             <a:fld id="{EED1C14C-A143-42F5-B247-D0E800131009}" type="datetimeFigureOut">
               <a:rPr lang="en-US" smtClean="0"/>
-              <a:t>2/6/2025</a:t>
+              <a:t>12/17/2025</a:t>
             </a:fld>
             <a:endParaRPr lang="en-US"/>
           </a:p>
@@ -2566,7 +2566,7 @@
           <a:p>
             <a:fld id="{EED1C14C-A143-42F5-B247-D0E800131009}" type="datetimeFigureOut">
               <a:rPr lang="en-US" smtClean="0"/>
-              <a:t>2/6/2025</a:t>
+              <a:t>12/17/2025</a:t>
             </a:fld>
             <a:endParaRPr lang="en-US"/>
           </a:p>
@@ -2973,10 +2973,10 @@
       </p:grpSpPr>
       <p:grpSp>
         <p:nvGrpSpPr>
-          <p:cNvPr id="4" name="Group 3">
+          <p:cNvPr id="7" name="Group 6">
             <a:extLst>
               <a:ext uri="{FF2B5EF4-FFF2-40B4-BE49-F238E27FC236}">
-                <a16:creationId xmlns:a16="http://schemas.microsoft.com/office/drawing/2014/main" id="{9DACF0FE-7E01-5AEF-462B-9124F3AF305A}"/>
+                <a16:creationId xmlns:a16="http://schemas.microsoft.com/office/drawing/2014/main" id="{AB3E899A-129A-3768-2DD2-7E7CE5F734F2}"/>
               </a:ext>
             </a:extLst>
           </p:cNvPr>
@@ -2986,17 +2986,17 @@
         <p:grpSpPr>
           <a:xfrm>
             <a:off x="0" y="0"/>
-            <a:ext cx="6858000" cy="9828703"/>
+            <a:ext cx="6858000" cy="9969208"/>
             <a:chOff x="0" y="0"/>
-            <a:chExt cx="6858000" cy="9828703"/>
+            <a:chExt cx="6858000" cy="9969208"/>
           </a:xfrm>
         </p:grpSpPr>
         <p:grpSp>
           <p:nvGrpSpPr>
-            <p:cNvPr id="16" name="Group 15">
+            <p:cNvPr id="4" name="Group 3">
               <a:extLst>
                 <a:ext uri="{FF2B5EF4-FFF2-40B4-BE49-F238E27FC236}">
-                  <a16:creationId xmlns:a16="http://schemas.microsoft.com/office/drawing/2014/main" id="{4600E31C-6BDD-9EDD-214A-39424BA3415A}"/>
+                  <a16:creationId xmlns:a16="http://schemas.microsoft.com/office/drawing/2014/main" id="{9DACF0FE-7E01-5AEF-462B-9124F3AF305A}"/>
                 </a:ext>
               </a:extLst>
             </p:cNvPr>
@@ -3005,230 +3005,125 @@
           </p:nvGrpSpPr>
           <p:grpSpPr>
             <a:xfrm>
-              <a:off x="0" y="125425"/>
-              <a:ext cx="6858000" cy="9703278"/>
-              <a:chOff x="0" y="101361"/>
-              <a:chExt cx="6858000" cy="9703278"/>
+              <a:off x="0" y="0"/>
+              <a:ext cx="2784231" cy="294004"/>
+              <a:chOff x="0" y="0"/>
+              <a:chExt cx="2784231" cy="294004"/>
             </a:xfrm>
           </p:grpSpPr>
-          <p:pic>
-            <p:nvPicPr>
-              <p:cNvPr id="13" name="Picture 12" descr="A screenshot of a computer screen&#10;&#10;Description automatically generated">
+          <p:sp>
+            <p:nvSpPr>
+              <p:cNvPr id="2" name="TextBox 1">
                 <a:extLst>
                   <a:ext uri="{FF2B5EF4-FFF2-40B4-BE49-F238E27FC236}">
-                    <a16:creationId xmlns:a16="http://schemas.microsoft.com/office/drawing/2014/main" id="{FC2DBDD7-D2A6-74B6-58B1-3165683EE150}"/>
+                    <a16:creationId xmlns:a16="http://schemas.microsoft.com/office/drawing/2014/main" id="{B4250E6D-77CA-91AD-C783-09A4BF64C5A5}"/>
                   </a:ext>
                 </a:extLst>
               </p:cNvPr>
-              <p:cNvPicPr>
-                <a:picLocks noChangeAspect="1"/>
-              </p:cNvPicPr>
+              <p:cNvSpPr txBox="1"/>
               <p:nvPr/>
-            </p:nvPicPr>
-            <p:blipFill>
-              <a:blip r:embed="rId2">
-                <a:extLst>
-                  <a:ext uri="{28A0092B-C50C-407E-A947-70E740481C1C}">
-                    <a14:useLocalDpi xmlns:a14="http://schemas.microsoft.com/office/drawing/2010/main" val="0"/>
-                  </a:ext>
-                </a:extLst>
-              </a:blip>
-              <a:stretch>
-                <a:fillRect/>
-              </a:stretch>
-            </p:blipFill>
+            </p:nvSpPr>
             <p:spPr>
               <a:xfrm>
-                <a:off x="0" y="101361"/>
-                <a:ext cx="6858000" cy="9703278"/>
+                <a:off x="0" y="0"/>
+                <a:ext cx="253596" cy="276999"/>
               </a:xfrm>
               <a:prstGeom prst="rect">
                 <a:avLst/>
               </a:prstGeom>
+              <a:noFill/>
             </p:spPr>
-          </p:pic>
-          <p:pic>
-            <p:nvPicPr>
-              <p:cNvPr id="14" name="Picture 13" descr="A screenshot of a computer screen&#10;&#10;Description automatically generated">
+            <p:txBody>
+              <a:bodyPr wrap="none" rtlCol="0">
+                <a:spAutoFit/>
+              </a:bodyPr>
+              <a:lstStyle/>
+              <a:p>
+                <a:r>
+                  <a:rPr lang="en-US" sz="1200" dirty="0">
+                    <a:latin typeface="Times New Roman" panose="02020603050405020304" pitchFamily="18" charset="0"/>
+                    <a:cs typeface="Times New Roman" panose="02020603050405020304" pitchFamily="18" charset="0"/>
+                  </a:rPr>
+                  <a:t>a</a:t>
+                </a:r>
+              </a:p>
+            </p:txBody>
+          </p:sp>
+          <p:sp>
+            <p:nvSpPr>
+              <p:cNvPr id="3" name="TextBox 2">
                 <a:extLst>
                   <a:ext uri="{FF2B5EF4-FFF2-40B4-BE49-F238E27FC236}">
-                    <a16:creationId xmlns:a16="http://schemas.microsoft.com/office/drawing/2014/main" id="{D67A59D5-D0FD-7A01-1F3B-D85DBAA6882A}"/>
+                    <a16:creationId xmlns:a16="http://schemas.microsoft.com/office/drawing/2014/main" id="{04E4890C-6199-21E4-6DDC-A7FA04307398}"/>
                   </a:ext>
                 </a:extLst>
               </p:cNvPr>
-              <p:cNvPicPr>
-                <a:picLocks noChangeAspect="1"/>
-              </p:cNvPicPr>
+              <p:cNvSpPr txBox="1"/>
               <p:nvPr/>
-            </p:nvPicPr>
-            <p:blipFill>
-              <a:blip r:embed="rId3">
-                <a:extLst>
-                  <a:ext uri="{28A0092B-C50C-407E-A947-70E740481C1C}">
-                    <a14:useLocalDpi xmlns:a14="http://schemas.microsoft.com/office/drawing/2010/main" val="0"/>
-                  </a:ext>
-                </a:extLst>
-              </a:blip>
-              <a:srcRect l="61155" t="63477" r="32318" b="35051"/>
-              <a:stretch/>
-            </p:blipFill>
+            </p:nvSpPr>
             <p:spPr>
               <a:xfrm>
-                <a:off x="4232910" y="6257924"/>
-                <a:ext cx="447676" cy="142876"/>
+                <a:off x="2522621" y="17005"/>
+                <a:ext cx="261610" cy="276999"/>
               </a:xfrm>
               <a:prstGeom prst="rect">
                 <a:avLst/>
               </a:prstGeom>
+              <a:noFill/>
             </p:spPr>
-          </p:pic>
-          <p:pic>
-            <p:nvPicPr>
-              <p:cNvPr id="15" name="Picture 14" descr="A screenshot of a computer screen&#10;&#10;Description automatically generated">
-                <a:extLst>
-                  <a:ext uri="{FF2B5EF4-FFF2-40B4-BE49-F238E27FC236}">
-                    <a16:creationId xmlns:a16="http://schemas.microsoft.com/office/drawing/2014/main" id="{41CE0E52-34CA-F73D-1ABF-4728AAC0BA4A}"/>
-                  </a:ext>
-                </a:extLst>
-              </p:cNvPr>
-              <p:cNvPicPr>
-                <a:picLocks noChangeAspect="1"/>
-              </p:cNvPicPr>
-              <p:nvPr/>
-            </p:nvPicPr>
-            <p:blipFill>
-              <a:blip r:embed="rId3">
-                <a:extLst>
-                  <a:ext uri="{28A0092B-C50C-407E-A947-70E740481C1C}">
-                    <a14:useLocalDpi xmlns:a14="http://schemas.microsoft.com/office/drawing/2010/main" val="0"/>
-                  </a:ext>
-                </a:extLst>
-              </a:blip>
-              <a:srcRect l="61211" t="30480" r="32262" b="67674"/>
-              <a:stretch/>
-            </p:blipFill>
-            <p:spPr>
-              <a:xfrm>
-                <a:off x="4234815" y="3059447"/>
-                <a:ext cx="447676" cy="179053"/>
-              </a:xfrm>
-              <a:prstGeom prst="rect">
-                <a:avLst/>
-              </a:prstGeom>
-            </p:spPr>
-          </p:pic>
-          <p:pic>
-            <p:nvPicPr>
-              <p:cNvPr id="11" name="Picture 10" descr="A screenshot of a computer screen&#10;&#10;Description automatically generated">
-                <a:extLst>
-                  <a:ext uri="{FF2B5EF4-FFF2-40B4-BE49-F238E27FC236}">
-                    <a16:creationId xmlns:a16="http://schemas.microsoft.com/office/drawing/2014/main" id="{1AD35456-BD28-1EFB-7A0B-BE5DC91A64D1}"/>
-                  </a:ext>
-                </a:extLst>
-              </p:cNvPr>
-              <p:cNvPicPr>
-                <a:picLocks noChangeAspect="1"/>
-              </p:cNvPicPr>
-              <p:nvPr/>
-            </p:nvPicPr>
-            <p:blipFill>
-              <a:blip r:embed="rId3">
-                <a:extLst>
-                  <a:ext uri="{28A0092B-C50C-407E-A947-70E740481C1C}">
-                    <a14:useLocalDpi xmlns:a14="http://schemas.microsoft.com/office/drawing/2010/main" val="0"/>
-                  </a:ext>
-                </a:extLst>
-              </a:blip>
-              <a:srcRect l="61041" t="96177" r="31579" b="1977"/>
-              <a:stretch/>
-            </p:blipFill>
-            <p:spPr>
-              <a:xfrm>
-                <a:off x="4190999" y="9431687"/>
-                <a:ext cx="506113" cy="179053"/>
-              </a:xfrm>
-              <a:prstGeom prst="rect">
-                <a:avLst/>
-              </a:prstGeom>
-            </p:spPr>
-          </p:pic>
+            <p:txBody>
+              <a:bodyPr wrap="none" rtlCol="0">
+                <a:spAutoFit/>
+              </a:bodyPr>
+              <a:lstStyle/>
+              <a:p>
+                <a:r>
+                  <a:rPr lang="en-US" sz="1200" dirty="0">
+                    <a:latin typeface="Times New Roman" panose="02020603050405020304" pitchFamily="18" charset="0"/>
+                    <a:cs typeface="Times New Roman" panose="02020603050405020304" pitchFamily="18" charset="0"/>
+                  </a:rPr>
+                  <a:t>b</a:t>
+                </a:r>
+              </a:p>
+            </p:txBody>
+          </p:sp>
         </p:grpSp>
-        <p:sp>
-          <p:nvSpPr>
-            <p:cNvPr id="2" name="TextBox 1">
+        <p:pic>
+          <p:nvPicPr>
+            <p:cNvPr id="6" name="Picture 5" descr="A screenshot of a computer screen&#10;&#10;AI-generated content may be incorrect.">
               <a:extLst>
                 <a:ext uri="{FF2B5EF4-FFF2-40B4-BE49-F238E27FC236}">
-                  <a16:creationId xmlns:a16="http://schemas.microsoft.com/office/drawing/2014/main" id="{B4250E6D-77CA-91AD-C783-09A4BF64C5A5}"/>
+                  <a16:creationId xmlns:a16="http://schemas.microsoft.com/office/drawing/2014/main" id="{E81DA2A4-83D4-19AB-054C-5849995B1013}"/>
                 </a:ext>
               </a:extLst>
             </p:cNvPr>
-            <p:cNvSpPr txBox="1"/>
+            <p:cNvPicPr>
+              <a:picLocks noChangeAspect="1"/>
+            </p:cNvPicPr>
             <p:nvPr/>
-          </p:nvSpPr>
+          </p:nvPicPr>
+          <p:blipFill>
+            <a:blip r:embed="rId2">
+              <a:extLst>
+                <a:ext uri="{28A0092B-C50C-407E-A947-70E740481C1C}">
+                  <a14:useLocalDpi xmlns:a14="http://schemas.microsoft.com/office/drawing/2010/main" val="0"/>
+                </a:ext>
+              </a:extLst>
+            </a:blip>
+            <a:stretch>
+              <a:fillRect/>
+            </a:stretch>
+          </p:blipFill>
           <p:spPr>
             <a:xfrm>
-              <a:off x="0" y="0"/>
-              <a:ext cx="253596" cy="276999"/>
+              <a:off x="0" y="265930"/>
+              <a:ext cx="6858000" cy="9703278"/>
             </a:xfrm>
             <a:prstGeom prst="rect">
               <a:avLst/>
             </a:prstGeom>
-            <a:noFill/>
           </p:spPr>
-          <p:txBody>
-            <a:bodyPr wrap="none" rtlCol="0">
-              <a:spAutoFit/>
-            </a:bodyPr>
-            <a:lstStyle/>
-            <a:p>
-              <a:r>
-                <a:rPr lang="en-US" sz="1200" dirty="0">
-                  <a:latin typeface="Times New Roman" panose="02020603050405020304" pitchFamily="18" charset="0"/>
-                  <a:cs typeface="Times New Roman" panose="02020603050405020304" pitchFamily="18" charset="0"/>
-                </a:rPr>
-                <a:t>a</a:t>
-              </a:r>
-            </a:p>
-          </p:txBody>
-        </p:sp>
-        <p:sp>
-          <p:nvSpPr>
-            <p:cNvPr id="3" name="TextBox 2">
-              <a:extLst>
-                <a:ext uri="{FF2B5EF4-FFF2-40B4-BE49-F238E27FC236}">
-                  <a16:creationId xmlns:a16="http://schemas.microsoft.com/office/drawing/2014/main" id="{04E4890C-6199-21E4-6DDC-A7FA04307398}"/>
-                </a:ext>
-              </a:extLst>
-            </p:cNvPr>
-            <p:cNvSpPr txBox="1"/>
-            <p:nvPr/>
-          </p:nvSpPr>
-          <p:spPr>
-            <a:xfrm>
-              <a:off x="2522621" y="17005"/>
-              <a:ext cx="261610" cy="276999"/>
-            </a:xfrm>
-            <a:prstGeom prst="rect">
-              <a:avLst/>
-            </a:prstGeom>
-            <a:noFill/>
-          </p:spPr>
-          <p:txBody>
-            <a:bodyPr wrap="none" rtlCol="0">
-              <a:spAutoFit/>
-            </a:bodyPr>
-            <a:lstStyle/>
-            <a:p>
-              <a:r>
-                <a:rPr lang="en-US" sz="1200" dirty="0">
-                  <a:latin typeface="Times New Roman" panose="02020603050405020304" pitchFamily="18" charset="0"/>
-                  <a:cs typeface="Times New Roman" panose="02020603050405020304" pitchFamily="18" charset="0"/>
-                </a:rPr>
-                <a:t>b</a:t>
-              </a:r>
-            </a:p>
-          </p:txBody>
-        </p:sp>
+        </p:pic>
       </p:grpSp>
     </p:spTree>
     <p:extLst>
